--- a/docs/lectures/01_02_project_design_graphing/project_design_graphing.pptx
+++ b/docs/lectures/01_02_project_design_graphing/project_design_graphing.pptx
@@ -4049,7 +4049,7 @@
       </p:sp>
       <p:graphicFrame xmlns:a="http://schemas.openxmlformats.org/drawingml/2006/main" xmlns:r="http://schemas.openxmlformats.org/officeDocument/2006/relationships" xmlns:p="http://schemas.openxmlformats.org/presentationml/2006/main">
         <p:nvGraphicFramePr>
-          <p:cNvPr id="882506632" name=""/>
+          <p:cNvPr id="887692559" name=""/>
           <p:cNvGraphicFramePr>
             <a:graphicFrameLocks noGrp="true"/>
           </p:cNvGraphicFramePr>

--- a/docs/lectures/01_02_project_design_graphing/project_design_graphing.pptx
+++ b/docs/lectures/01_02_project_design_graphing/project_design_graphing.pptx
@@ -4049,7 +4049,7 @@
       </p:sp>
       <p:graphicFrame xmlns:a="http://schemas.openxmlformats.org/drawingml/2006/main" xmlns:r="http://schemas.openxmlformats.org/officeDocument/2006/relationships" xmlns:p="http://schemas.openxmlformats.org/presentationml/2006/main">
         <p:nvGraphicFramePr>
-          <p:cNvPr id="887692559" name=""/>
+          <p:cNvPr id="225836237" name=""/>
           <p:cNvGraphicFramePr>
             <a:graphicFrameLocks noGrp="true"/>
           </p:cNvGraphicFramePr>

--- a/docs/lectures/01_02_project_design_graphing/project_design_graphing.pptx
+++ b/docs/lectures/01_02_project_design_graphing/project_design_graphing.pptx
@@ -4049,7 +4049,7 @@
       </p:sp>
       <p:graphicFrame xmlns:a="http://schemas.openxmlformats.org/drawingml/2006/main" xmlns:r="http://schemas.openxmlformats.org/officeDocument/2006/relationships" xmlns:p="http://schemas.openxmlformats.org/presentationml/2006/main">
         <p:nvGraphicFramePr>
-          <p:cNvPr id="225836237" name=""/>
+          <p:cNvPr id="245211924" name=""/>
           <p:cNvGraphicFramePr>
             <a:graphicFrameLocks noGrp="true"/>
           </p:cNvGraphicFramePr>
